--- a/docs/apresentacao-analytic-eyes/Analytic-Eyes-Apresentacao.pptx
+++ b/docs/apresentacao-analytic-eyes/Analytic-Eyes-Apresentacao.pptx
@@ -21,6 +21,12 @@
     <p:sldId id="269" r:id="rId20"/>
     <p:sldId id="270" r:id="rId21"/>
     <p:sldId id="271" r:id="rId22"/>
+    <p:sldId id="272" r:id="rId23"/>
+    <p:sldId id="273" r:id="rId24"/>
+    <p:sldId id="274" r:id="rId25"/>
+    <p:sldId id="275" r:id="rId26"/>
+    <p:sldId id="276" r:id="rId27"/>
+    <p:sldId id="277" r:id="rId28"/>
   </p:sldIdLst>
   <p:sldSz cx="12191695" cy="6858000" type="screen4x3"/>
   <p:notesSz cx="6858000" cy="9144000"/>
@@ -6827,7 +6833,7 @@
     <p:bg>
       <p:bgPr>
         <a:solidFill>
-          <a:srgbClr val="0F213B"/>
+          <a:srgbClr val="FFFFFF"/>
         </a:solidFill>
         <a:effectLst/>
       </p:bgPr>
@@ -6847,8 +6853,8 @@
         </p:nvSpPr>
         <p:spPr>
           <a:xfrm>
-            <a:off x="0" y="3017520"/>
-            <a:ext cx="12191695" cy="38100"/>
+            <a:off x="0" y="0"/>
+            <a:ext cx="12191695" cy="109728"/>
           </a:xfrm>
           <a:prstGeom prst="rect">
             <a:avLst/>
@@ -6891,8 +6897,8 @@
         </p:nvSpPr>
         <p:spPr>
           <a:xfrm>
-            <a:off x="822960" y="2377440"/>
-            <a:ext cx="10515600" cy="914400"/>
+            <a:off x="640080" y="320040"/>
+            <a:ext cx="9144000" cy="365760"/>
           </a:xfrm>
           <a:prstGeom prst="rect">
             <a:avLst/>
@@ -6907,13 +6913,13 @@
           <a:p>
             <a:pPr algn="l"/>
             <a:r>
-              <a:rPr sz="4400" b="1" i="0">
-                <a:solidFill>
-                  <a:srgbClr val="FFFFFF"/>
-                </a:solidFill>
-                <a:latin typeface="Calibri"/>
-              </a:rPr>
-              <a:t>Obrigado</a:t>
+              <a:rPr sz="1300" b="1" i="0">
+                <a:solidFill>
+                  <a:srgbClr val="1F6FEB"/>
+                </a:solidFill>
+                <a:latin typeface="Calibri"/>
+              </a:rPr>
+              <a:t>ATUALIZAÇÃO</a:t>
             </a:r>
           </a:p>
         </p:txBody>
@@ -6926,8 +6932,8 @@
         </p:nvSpPr>
         <p:spPr>
           <a:xfrm>
-            <a:off x="822960" y="3246120"/>
-            <a:ext cx="10058400" cy="548640"/>
+            <a:off x="640080" y="640080"/>
+            <a:ext cx="10789920" cy="822960"/>
           </a:xfrm>
           <a:prstGeom prst="rect">
             <a:avLst/>
@@ -6942,27 +6948,71 @@
           <a:p>
             <a:pPr algn="l"/>
             <a:r>
-              <a:rPr sz="1800" b="0" i="0">
-                <a:solidFill>
-                  <a:srgbClr val="9FC1FF"/>
-                </a:solidFill>
-                <a:latin typeface="Calibri"/>
-              </a:rPr>
-              <a:t>Dúvidas e discussão</a:t>
-            </a:r>
-          </a:p>
-        </p:txBody>
-      </p:sp>
-      <p:sp>
-        <p:nvSpPr>
-          <p:cNvPr id="5" name="TextBox 4"/>
-          <p:cNvSpPr txBox="1"/>
-          <p:nvPr/>
-        </p:nvSpPr>
-        <p:spPr>
-          <a:xfrm>
-            <a:off x="822960" y="6035040"/>
-            <a:ext cx="10058400" cy="365760"/>
+              <a:rPr sz="3000" b="1" i="0">
+                <a:solidFill>
+                  <a:srgbClr val="0F213B"/>
+                </a:solidFill>
+                <a:latin typeface="Calibri"/>
+              </a:rPr>
+              <a:t>Nova Funcionalidade: Gerenciamento de Usuários</a:t>
+            </a:r>
+          </a:p>
+        </p:txBody>
+      </p:sp>
+      <p:sp>
+        <p:nvSpPr>
+          <p:cNvPr id="5" name="Rectangle 4"/>
+          <p:cNvSpPr/>
+          <p:nvPr/>
+        </p:nvSpPr>
+        <p:spPr>
+          <a:xfrm>
+            <a:off x="640080" y="1417320"/>
+            <a:ext cx="1005840" cy="38100"/>
+          </a:xfrm>
+          <a:prstGeom prst="rect">
+            <a:avLst/>
+          </a:prstGeom>
+          <a:solidFill>
+            <a:srgbClr val="1F6FEB"/>
+          </a:solidFill>
+          <a:ln>
+            <a:noFill/>
+          </a:ln>
+          <a:effectLst/>
+        </p:spPr>
+        <p:style>
+          <a:lnRef idx="1">
+            <a:schemeClr val="accent1"/>
+          </a:lnRef>
+          <a:fillRef idx="3">
+            <a:schemeClr val="accent1"/>
+          </a:fillRef>
+          <a:effectRef idx="2">
+            <a:schemeClr val="accent1"/>
+          </a:effectRef>
+          <a:fontRef idx="minor">
+            <a:schemeClr val="lt1"/>
+          </a:fontRef>
+        </p:style>
+        <p:txBody>
+          <a:bodyPr rtlCol="0" anchor="ctr"/>
+          <a:lstStyle/>
+          <a:p>
+            <a:pPr algn="ctr"/>
+          </a:p>
+        </p:txBody>
+      </p:sp>
+      <p:sp>
+        <p:nvSpPr>
+          <p:cNvPr id="6" name="TextBox 5"/>
+          <p:cNvSpPr txBox="1"/>
+          <p:nvPr/>
+        </p:nvSpPr>
+        <p:spPr>
+          <a:xfrm>
+            <a:off x="640080" y="1691640"/>
+            <a:ext cx="10789920" cy="548640"/>
           </a:xfrm>
           <a:prstGeom prst="rect">
             <a:avLst/>
@@ -6977,13 +7027,1813 @@
           <a:p>
             <a:pPr algn="l"/>
             <a:r>
+              <a:rPr sz="1500" b="0" i="0">
+                <a:solidFill>
+                  <a:srgbClr val="4A5568"/>
+                </a:solidFill>
+                <a:latin typeface="Calibri"/>
+              </a:rPr>
+              <a:t>Suporte a múltiplos administradores, direto na tela de Configurações.</a:t>
+            </a:r>
+          </a:p>
+        </p:txBody>
+      </p:sp>
+      <p:sp>
+        <p:nvSpPr>
+          <p:cNvPr id="7" name="TextBox 6"/>
+          <p:cNvSpPr txBox="1"/>
+          <p:nvPr/>
+        </p:nvSpPr>
+        <p:spPr>
+          <a:xfrm>
+            <a:off x="822960" y="2468880"/>
+            <a:ext cx="10332720" cy="2377440"/>
+          </a:xfrm>
+          <a:prstGeom prst="rect">
+            <a:avLst/>
+          </a:prstGeom>
+          <a:noFill/>
+        </p:spPr>
+        <p:txBody>
+          <a:bodyPr wrap="square">
+            <a:spAutoFit/>
+          </a:bodyPr>
+          <a:lstStyle/>
+          <a:p>
+            <a:pPr>
+              <a:spcAft>
+                <a:spcPts val="1400"/>
+              </a:spcAft>
+            </a:pPr>
+            <a:r>
+              <a:rPr sz="1500">
+                <a:solidFill>
+                  <a:srgbClr val="0F213B"/>
+                </a:solidFill>
+                <a:latin typeface="Calibri"/>
+              </a:rPr>
+              <a:t>•  Criação de usuário já com opção "esta conta será administradora"</a:t>
+            </a:r>
+          </a:p>
+          <a:p>
+            <a:pPr>
+              <a:spcAft>
+                <a:spcPts val="1400"/>
+              </a:spcAft>
+            </a:pPr>
+            <a:r>
+              <a:rPr sz="1500">
+                <a:solidFill>
+                  <a:srgbClr val="0F213B"/>
+                </a:solidFill>
+                <a:latin typeface="Calibri"/>
+              </a:rPr>
+              <a:t>•  Promover ou remover administrador de qualquer conta existente</a:t>
+            </a:r>
+          </a:p>
+          <a:p>
+            <a:pPr>
+              <a:spcAft>
+                <a:spcPts val="1400"/>
+              </a:spcAft>
+            </a:pPr>
+            <a:r>
+              <a:rPr sz="1500">
+                <a:solidFill>
+                  <a:srgbClr val="0F213B"/>
+                </a:solidFill>
+                <a:latin typeface="Calibri"/>
+              </a:rPr>
+              <a:t>•  Desativar/reativar conta ("excluir" implementado como desativação — preserva o histórico de pipelines da pessoa)</a:t>
+            </a:r>
+          </a:p>
+          <a:p>
+            <a:pPr>
+              <a:spcAft>
+                <a:spcPts val="1400"/>
+              </a:spcAft>
+            </a:pPr>
+            <a:r>
+              <a:rPr sz="1500">
+                <a:solidFill>
+                  <a:srgbClr val="0F213B"/>
+                </a:solidFill>
+                <a:latin typeface="Calibri"/>
+              </a:rPr>
+              <a:t>•  Redefinir a senha de qualquer outro usuário diretamente pela interface</a:t>
+            </a:r>
+          </a:p>
+        </p:txBody>
+      </p:sp>
+      <p:sp>
+        <p:nvSpPr>
+          <p:cNvPr id="8" name="Rectangle 7"/>
+          <p:cNvSpPr/>
+          <p:nvPr/>
+        </p:nvSpPr>
+        <p:spPr>
+          <a:xfrm>
+            <a:off x="640080" y="4709160"/>
+            <a:ext cx="10881360" cy="1371600"/>
+          </a:xfrm>
+          <a:prstGeom prst="rect">
+            <a:avLst/>
+          </a:prstGeom>
+          <a:solidFill>
+            <a:srgbClr val="E8F1FD"/>
+          </a:solidFill>
+          <a:ln>
+            <a:noFill/>
+          </a:ln>
+          <a:effectLst/>
+        </p:spPr>
+        <p:style>
+          <a:lnRef idx="1">
+            <a:schemeClr val="accent1"/>
+          </a:lnRef>
+          <a:fillRef idx="3">
+            <a:schemeClr val="accent1"/>
+          </a:fillRef>
+          <a:effectRef idx="2">
+            <a:schemeClr val="accent1"/>
+          </a:effectRef>
+          <a:fontRef idx="minor">
+            <a:schemeClr val="lt1"/>
+          </a:fontRef>
+        </p:style>
+        <p:txBody>
+          <a:bodyPr rtlCol="0" anchor="ctr"/>
+          <a:lstStyle/>
+          <a:p>
+            <a:pPr algn="ctr"/>
+          </a:p>
+        </p:txBody>
+      </p:sp>
+      <p:sp>
+        <p:nvSpPr>
+          <p:cNvPr id="9" name="TextBox 8"/>
+          <p:cNvSpPr txBox="1"/>
+          <p:nvPr/>
+        </p:nvSpPr>
+        <p:spPr>
+          <a:xfrm>
+            <a:off x="868680" y="4846320"/>
+            <a:ext cx="10424160" cy="365760"/>
+          </a:xfrm>
+          <a:prstGeom prst="rect">
+            <a:avLst/>
+          </a:prstGeom>
+          <a:noFill/>
+        </p:spPr>
+        <p:txBody>
+          <a:bodyPr wrap="square">
+            <a:spAutoFit/>
+          </a:bodyPr>
+          <a:lstStyle/>
+          <a:p>
+            <a:pPr algn="l"/>
+            <a:r>
+              <a:rPr sz="1350" b="1" i="0">
+                <a:solidFill>
+                  <a:srgbClr val="0F213B"/>
+                </a:solidFill>
+                <a:latin typeface="Calibri"/>
+              </a:rPr>
+              <a:t>Decisão de design</a:t>
+            </a:r>
+          </a:p>
+        </p:txBody>
+      </p:sp>
+      <p:sp>
+        <p:nvSpPr>
+          <p:cNvPr id="10" name="TextBox 9"/>
+          <p:cNvSpPr txBox="1"/>
+          <p:nvPr/>
+        </p:nvSpPr>
+        <p:spPr>
+          <a:xfrm>
+            <a:off x="868680" y="5166360"/>
+            <a:ext cx="10424160" cy="868680"/>
+          </a:xfrm>
+          <a:prstGeom prst="rect">
+            <a:avLst/>
+          </a:prstGeom>
+          <a:noFill/>
+        </p:spPr>
+        <p:txBody>
+          <a:bodyPr wrap="square">
+            <a:spAutoFit/>
+          </a:bodyPr>
+          <a:lstStyle/>
+          <a:p>
+            <a:pPr algn="l"/>
+            <a:r>
               <a:rPr sz="1200" b="0" i="0">
                 <a:solidFill>
-                  <a:srgbClr val="B9C7DE"/>
-                </a:solidFill>
-                <a:latin typeface="Calibri"/>
-              </a:rPr>
-              <a:t>Documentação técnica completa disponível em documento complementar.</a:t>
+                  <a:srgbClr val="4A5568"/>
+                </a:solidFill>
+                <a:latin typeface="Calibri"/>
+              </a:rPr>
+              <a:t>Pipeline.owner usa on_delete=CASCADE — excluir um usuário de verdade apagaria as pipelines dele. Por isso "excluir conta" foi implementado como desativação (reversível), não exclusão real.</a:t>
+            </a:r>
+          </a:p>
+        </p:txBody>
+      </p:sp>
+      <p:sp>
+        <p:nvSpPr>
+          <p:cNvPr id="11" name="TextBox 10"/>
+          <p:cNvSpPr txBox="1"/>
+          <p:nvPr/>
+        </p:nvSpPr>
+        <p:spPr>
+          <a:xfrm>
+            <a:off x="640080" y="6473952"/>
+            <a:ext cx="5486400" cy="320040"/>
+          </a:xfrm>
+          <a:prstGeom prst="rect">
+            <a:avLst/>
+          </a:prstGeom>
+          <a:noFill/>
+        </p:spPr>
+        <p:txBody>
+          <a:bodyPr wrap="square">
+            <a:spAutoFit/>
+          </a:bodyPr>
+          <a:lstStyle/>
+          <a:p>
+            <a:pPr algn="l"/>
+            <a:r>
+              <a:rPr sz="900" b="0" i="0">
+                <a:solidFill>
+                  <a:srgbClr val="6B7A99"/>
+                </a:solidFill>
+                <a:latin typeface="Calibri"/>
+              </a:rPr>
+              <a:t>Analytic Eyes — Plataforma de Orquestração de Pipelines ETL</a:t>
+            </a:r>
+          </a:p>
+        </p:txBody>
+      </p:sp>
+      <p:sp>
+        <p:nvSpPr>
+          <p:cNvPr id="12" name="TextBox 11"/>
+          <p:cNvSpPr txBox="1"/>
+          <p:nvPr/>
+        </p:nvSpPr>
+        <p:spPr>
+          <a:xfrm>
+            <a:off x="10972800" y="6473952"/>
+            <a:ext cx="731520" cy="320040"/>
+          </a:xfrm>
+          <a:prstGeom prst="rect">
+            <a:avLst/>
+          </a:prstGeom>
+          <a:noFill/>
+        </p:spPr>
+        <p:txBody>
+          <a:bodyPr wrap="square">
+            <a:spAutoFit/>
+          </a:bodyPr>
+          <a:lstStyle/>
+          <a:p>
+            <a:pPr algn="r"/>
+            <a:r>
+              <a:rPr sz="900" b="0" i="0">
+                <a:solidFill>
+                  <a:srgbClr val="6B7A99"/>
+                </a:solidFill>
+                <a:latin typeface="Calibri"/>
+              </a:rPr>
+              <a:t>16</a:t>
+            </a:r>
+          </a:p>
+        </p:txBody>
+      </p:sp>
+    </p:spTree>
+  </p:cSld>
+  <p:clrMapOvr>
+    <a:masterClrMapping/>
+  </p:clrMapOvr>
+</p:sld>
+</file>
+
+<file path=ppt/slides/slide17.xml><?xml version="1.0" encoding="utf-8"?>
+<p:sld xmlns:a="http://schemas.openxmlformats.org/drawingml/2006/main" xmlns:p="http://schemas.openxmlformats.org/presentationml/2006/main" xmlns:r="http://schemas.openxmlformats.org/officeDocument/2006/relationships">
+  <p:cSld>
+    <p:bg>
+      <p:bgPr>
+        <a:solidFill>
+          <a:srgbClr val="FFFFFF"/>
+        </a:solidFill>
+        <a:effectLst/>
+      </p:bgPr>
+    </p:bg>
+    <p:spTree>
+      <p:nvGrpSpPr>
+        <p:cNvPr id="1" name=""/>
+        <p:cNvGrpSpPr/>
+        <p:nvPr/>
+      </p:nvGrpSpPr>
+      <p:grpSpPr/>
+      <p:sp>
+        <p:nvSpPr>
+          <p:cNvPr id="2" name="Rectangle 1"/>
+          <p:cNvSpPr/>
+          <p:nvPr/>
+        </p:nvSpPr>
+        <p:spPr>
+          <a:xfrm>
+            <a:off x="0" y="0"/>
+            <a:ext cx="12191695" cy="109728"/>
+          </a:xfrm>
+          <a:prstGeom prst="rect">
+            <a:avLst/>
+          </a:prstGeom>
+          <a:solidFill>
+            <a:srgbClr val="1F6FEB"/>
+          </a:solidFill>
+          <a:ln>
+            <a:noFill/>
+          </a:ln>
+          <a:effectLst/>
+        </p:spPr>
+        <p:style>
+          <a:lnRef idx="1">
+            <a:schemeClr val="accent1"/>
+          </a:lnRef>
+          <a:fillRef idx="3">
+            <a:schemeClr val="accent1"/>
+          </a:fillRef>
+          <a:effectRef idx="2">
+            <a:schemeClr val="accent1"/>
+          </a:effectRef>
+          <a:fontRef idx="minor">
+            <a:schemeClr val="lt1"/>
+          </a:fontRef>
+        </p:style>
+        <p:txBody>
+          <a:bodyPr rtlCol="0" anchor="ctr"/>
+          <a:lstStyle/>
+          <a:p>
+            <a:pPr algn="ctr"/>
+          </a:p>
+        </p:txBody>
+      </p:sp>
+      <p:sp>
+        <p:nvSpPr>
+          <p:cNvPr id="3" name="TextBox 2"/>
+          <p:cNvSpPr txBox="1"/>
+          <p:nvPr/>
+        </p:nvSpPr>
+        <p:spPr>
+          <a:xfrm>
+            <a:off x="640080" y="320040"/>
+            <a:ext cx="9144000" cy="365760"/>
+          </a:xfrm>
+          <a:prstGeom prst="rect">
+            <a:avLst/>
+          </a:prstGeom>
+          <a:noFill/>
+        </p:spPr>
+        <p:txBody>
+          <a:bodyPr wrap="square">
+            <a:spAutoFit/>
+          </a:bodyPr>
+          <a:lstStyle/>
+          <a:p>
+            <a:pPr algn="l"/>
+            <a:r>
+              <a:rPr sz="1300" b="1" i="0">
+                <a:solidFill>
+                  <a:srgbClr val="1F6FEB"/>
+                </a:solidFill>
+                <a:latin typeface="Calibri"/>
+              </a:rPr>
+              <a:t>SEGURANÇA</a:t>
+            </a:r>
+          </a:p>
+        </p:txBody>
+      </p:sp>
+      <p:sp>
+        <p:nvSpPr>
+          <p:cNvPr id="4" name="TextBox 3"/>
+          <p:cNvSpPr txBox="1"/>
+          <p:nvPr/>
+        </p:nvSpPr>
+        <p:spPr>
+          <a:xfrm>
+            <a:off x="640080" y="640080"/>
+            <a:ext cx="10789920" cy="822960"/>
+          </a:xfrm>
+          <a:prstGeom prst="rect">
+            <a:avLst/>
+          </a:prstGeom>
+          <a:noFill/>
+        </p:spPr>
+        <p:txBody>
+          <a:bodyPr wrap="square">
+            <a:spAutoFit/>
+          </a:bodyPr>
+          <a:lstStyle/>
+          <a:p>
+            <a:pPr algn="l"/>
+            <a:r>
+              <a:rPr sz="3000" b="1" i="0">
+                <a:solidFill>
+                  <a:srgbClr val="0F213B"/>
+                </a:solidFill>
+                <a:latin typeface="Calibri"/>
+              </a:rPr>
+              <a:t>Revisão de Segurança e Correções Aplicadas</a:t>
+            </a:r>
+          </a:p>
+        </p:txBody>
+      </p:sp>
+      <p:sp>
+        <p:nvSpPr>
+          <p:cNvPr id="5" name="Rectangle 4"/>
+          <p:cNvSpPr/>
+          <p:nvPr/>
+        </p:nvSpPr>
+        <p:spPr>
+          <a:xfrm>
+            <a:off x="640080" y="1417320"/>
+            <a:ext cx="1005840" cy="38100"/>
+          </a:xfrm>
+          <a:prstGeom prst="rect">
+            <a:avLst/>
+          </a:prstGeom>
+          <a:solidFill>
+            <a:srgbClr val="1F6FEB"/>
+          </a:solidFill>
+          <a:ln>
+            <a:noFill/>
+          </a:ln>
+          <a:effectLst/>
+        </p:spPr>
+        <p:style>
+          <a:lnRef idx="1">
+            <a:schemeClr val="accent1"/>
+          </a:lnRef>
+          <a:fillRef idx="3">
+            <a:schemeClr val="accent1"/>
+          </a:fillRef>
+          <a:effectRef idx="2">
+            <a:schemeClr val="accent1"/>
+          </a:effectRef>
+          <a:fontRef idx="minor">
+            <a:schemeClr val="lt1"/>
+          </a:fontRef>
+        </p:style>
+        <p:txBody>
+          <a:bodyPr rtlCol="0" anchor="ctr"/>
+          <a:lstStyle/>
+          <a:p>
+            <a:pPr algn="ctr"/>
+          </a:p>
+        </p:txBody>
+      </p:sp>
+      <p:sp>
+        <p:nvSpPr>
+          <p:cNvPr id="6" name="TextBox 5"/>
+          <p:cNvSpPr txBox="1"/>
+          <p:nvPr/>
+        </p:nvSpPr>
+        <p:spPr>
+          <a:xfrm>
+            <a:off x="640080" y="1691640"/>
+            <a:ext cx="10789920" cy="457200"/>
+          </a:xfrm>
+          <a:prstGeom prst="rect">
+            <a:avLst/>
+          </a:prstGeom>
+          <a:noFill/>
+        </p:spPr>
+        <p:txBody>
+          <a:bodyPr wrap="square">
+            <a:spAutoFit/>
+          </a:bodyPr>
+          <a:lstStyle/>
+          <a:p>
+            <a:pPr algn="l"/>
+            <a:r>
+              <a:rPr sz="1400" b="0" i="0">
+                <a:solidFill>
+                  <a:srgbClr val="4A5568"/>
+                </a:solidFill>
+                <a:latin typeface="Calibri"/>
+              </a:rPr>
+              <a:t>Duas rodadas de revisão com metodologia de verificação independente por achado.</a:t>
+            </a:r>
+          </a:p>
+        </p:txBody>
+      </p:sp>
+      <p:graphicFrame>
+        <p:nvGraphicFramePr>
+          <p:cNvPr id="7" name="Table 6"/>
+          <p:cNvGraphicFramePr>
+            <a:graphicFrameLocks noGrp="1"/>
+          </p:cNvGraphicFramePr>
+          <p:nvPr/>
+        </p:nvGraphicFramePr>
+        <p:xfrm>
+          <a:off x="502920" y="2331720"/>
+          <a:ext cx="11155680" cy="3108960"/>
+        </p:xfrm>
+        <a:graphic>
+          <a:graphicData uri="http://schemas.openxmlformats.org/drawingml/2006/table">
+            <a:tbl>
+              <a:tblPr firstRow="1" bandRow="1">
+                <a:tableStyleId>{5C22544A-7EE6-4342-B048-85BDC9FD1C3A}</a:tableStyleId>
+              </a:tblPr>
+              <a:tblGrid>
+                <a:gridCol w="3291840"/>
+                <a:gridCol w="5852160"/>
+                <a:gridCol w="2011680"/>
+              </a:tblGrid>
+              <a:tr h="777240">
+                <a:tc>
+                  <a:txBody>
+                    <a:bodyPr/>
+                    <a:lstStyle/>
+                    <a:p>
+                      <a:r>
+                        <a:rPr b="1" sz="1200">
+                          <a:solidFill>
+                            <a:srgbClr val="FFFFFF"/>
+                          </a:solidFill>
+                        </a:rPr>
+                        <a:t>Escopo</a:t>
+                      </a:r>
+                    </a:p>
+                  </a:txBody>
+                  <a:tcPr>
+                    <a:solidFill>
+                      <a:srgbClr val="0F213B"/>
+                    </a:solidFill>
+                  </a:tcPr>
+                </a:tc>
+                <a:tc>
+                  <a:txBody>
+                    <a:bodyPr/>
+                    <a:lstStyle/>
+                    <a:p>
+                      <a:r>
+                        <a:rPr b="1" sz="1200">
+                          <a:solidFill>
+                            <a:srgbClr val="FFFFFF"/>
+                          </a:solidFill>
+                        </a:rPr>
+                        <a:t>O que foi encontrado</a:t>
+                      </a:r>
+                    </a:p>
+                  </a:txBody>
+                  <a:tcPr>
+                    <a:solidFill>
+                      <a:srgbClr val="0F213B"/>
+                    </a:solidFill>
+                  </a:tcPr>
+                </a:tc>
+                <a:tc>
+                  <a:txBody>
+                    <a:bodyPr/>
+                    <a:lstStyle/>
+                    <a:p>
+                      <a:r>
+                        <a:rPr b="1" sz="1200">
+                          <a:solidFill>
+                            <a:srgbClr val="FFFFFF"/>
+                          </a:solidFill>
+                        </a:rPr>
+                        <a:t>Resultado</a:t>
+                      </a:r>
+                    </a:p>
+                  </a:txBody>
+                  <a:tcPr>
+                    <a:solidFill>
+                      <a:srgbClr val="0F213B"/>
+                    </a:solidFill>
+                  </a:tcPr>
+                </a:tc>
+              </a:tr>
+              <a:tr h="777240">
+                <a:tc>
+                  <a:txBody>
+                    <a:bodyPr/>
+                    <a:lstStyle/>
+                    <a:p>
+                      <a:r>
+                        <a:rPr sz="1100" b="0">
+                          <a:solidFill>
+                            <a:srgbClr val="0F213B"/>
+                          </a:solidFill>
+                        </a:rPr>
+                        <a:t>Rodada 1 — Infraestrutura</a:t>
+                      </a:r>
+                    </a:p>
+                  </a:txBody>
+                  <a:tcPr anchor="ctr">
+                    <a:solidFill>
+                      <a:srgbClr val="FFFFFF"/>
+                    </a:solidFill>
+                  </a:tcPr>
+                </a:tc>
+                <a:tc>
+                  <a:txBody>
+                    <a:bodyPr/>
+                    <a:lstStyle/>
+                    <a:p>
+                      <a:r>
+                        <a:rPr sz="1100" b="0">
+                          <a:solidFill>
+                            <a:srgbClr val="0F213B"/>
+                          </a:solidFill>
+                        </a:rPr>
+                        <a:t>Redis sem senha, containers rodando como root, SECRET_KEY com fallback inseguro, painel /admin/ exposto, sem rate limit geral</a:t>
+                      </a:r>
+                    </a:p>
+                  </a:txBody>
+                  <a:tcPr anchor="ctr">
+                    <a:solidFill>
+                      <a:srgbClr val="FFFFFF"/>
+                    </a:solidFill>
+                  </a:tcPr>
+                </a:tc>
+                <a:tc>
+                  <a:txBody>
+                    <a:bodyPr/>
+                    <a:lstStyle/>
+                    <a:p>
+                      <a:r>
+                        <a:rPr sz="1100" b="1">
+                          <a:solidFill>
+                            <a:srgbClr val="1E8E3E"/>
+                          </a:solidFill>
+                        </a:rPr>
+                        <a:t>5 corrigidas</a:t>
+                      </a:r>
+                    </a:p>
+                  </a:txBody>
+                  <a:tcPr anchor="ctr">
+                    <a:solidFill>
+                      <a:srgbClr val="FFFFFF"/>
+                    </a:solidFill>
+                  </a:tcPr>
+                </a:tc>
+              </a:tr>
+              <a:tr h="777240">
+                <a:tc>
+                  <a:txBody>
+                    <a:bodyPr/>
+                    <a:lstStyle/>
+                    <a:p>
+                      <a:r>
+                        <a:rPr sz="1100" b="0">
+                          <a:solidFill>
+                            <a:srgbClr val="0F213B"/>
+                          </a:solidFill>
+                        </a:rPr>
+                        <a:t>Rodada 2 — Backend (gerenciamento de usuários)</a:t>
+                      </a:r>
+                    </a:p>
+                  </a:txBody>
+                  <a:tcPr anchor="ctr">
+                    <a:solidFill>
+                      <a:srgbClr val="F4F6F9"/>
+                    </a:solidFill>
+                  </a:tcPr>
+                </a:tc>
+                <a:tc>
+                  <a:txBody>
+                    <a:bodyPr/>
+                    <a:lstStyle/>
+                    <a:p>
+                      <a:r>
+                        <a:rPr sz="1100" b="0">
+                          <a:solidFill>
+                            <a:srgbClr val="0F213B"/>
+                          </a:solidFill>
+                        </a:rPr>
+                        <a:t>Qualquer administrador podia redefinir senha, remover admin ou desativar o superusuário real (sem checagem de superusuário)</a:t>
+                      </a:r>
+                    </a:p>
+                  </a:txBody>
+                  <a:tcPr anchor="ctr">
+                    <a:solidFill>
+                      <a:srgbClr val="F4F6F9"/>
+                    </a:solidFill>
+                  </a:tcPr>
+                </a:tc>
+                <a:tc>
+                  <a:txBody>
+                    <a:bodyPr/>
+                    <a:lstStyle/>
+                    <a:p>
+                      <a:r>
+                        <a:rPr sz="1100" b="1">
+                          <a:solidFill>
+                            <a:srgbClr val="1E8E3E"/>
+                          </a:solidFill>
+                        </a:rPr>
+                        <a:t>3 corrigidas, testadas (13/13)</a:t>
+                      </a:r>
+                    </a:p>
+                  </a:txBody>
+                  <a:tcPr anchor="ctr">
+                    <a:solidFill>
+                      <a:srgbClr val="F4F6F9"/>
+                    </a:solidFill>
+                  </a:tcPr>
+                </a:tc>
+              </a:tr>
+              <a:tr h="777240">
+                <a:tc>
+                  <a:txBody>
+                    <a:bodyPr/>
+                    <a:lstStyle/>
+                    <a:p>
+                      <a:r>
+                        <a:rPr sz="1100" b="0">
+                          <a:solidFill>
+                            <a:srgbClr val="0F213B"/>
+                          </a:solidFill>
+                        </a:rPr>
+                        <a:t>Rodada 2 — Frontend</a:t>
+                      </a:r>
+                    </a:p>
+                  </a:txBody>
+                  <a:tcPr anchor="ctr">
+                    <a:solidFill>
+                      <a:srgbClr val="FFFFFF"/>
+                    </a:solidFill>
+                  </a:tcPr>
+                </a:tc>
+                <a:tc>
+                  <a:txBody>
+                    <a:bodyPr/>
+                    <a:lstStyle/>
+                    <a:p>
+                      <a:r>
+                        <a:rPr sz="1100" b="0">
+                          <a:solidFill>
+                            <a:srgbClr val="0F213B"/>
+                          </a:solidFill>
+                        </a:rPr>
+                        <a:t>Revisão dedicada do código React novo (XSS, exposição de dados, armazenamento inseguro)</a:t>
+                      </a:r>
+                    </a:p>
+                  </a:txBody>
+                  <a:tcPr anchor="ctr">
+                    <a:solidFill>
+                      <a:srgbClr val="FFFFFF"/>
+                    </a:solidFill>
+                  </a:tcPr>
+                </a:tc>
+                <a:tc>
+                  <a:txBody>
+                    <a:bodyPr/>
+                    <a:lstStyle/>
+                    <a:p>
+                      <a:r>
+                        <a:rPr sz="1100" b="1">
+                          <a:solidFill>
+                            <a:srgbClr val="1E8E3E"/>
+                          </a:solidFill>
+                        </a:rPr>
+                        <a:t>0 vulnerabilidades confirmadas</a:t>
+                      </a:r>
+                    </a:p>
+                  </a:txBody>
+                  <a:tcPr anchor="ctr">
+                    <a:solidFill>
+                      <a:srgbClr val="FFFFFF"/>
+                    </a:solidFill>
+                  </a:tcPr>
+                </a:tc>
+              </a:tr>
+            </a:tbl>
+          </a:graphicData>
+        </a:graphic>
+      </p:graphicFrame>
+      <p:sp>
+        <p:nvSpPr>
+          <p:cNvPr id="8" name="TextBox 7"/>
+          <p:cNvSpPr txBox="1"/>
+          <p:nvPr/>
+        </p:nvSpPr>
+        <p:spPr>
+          <a:xfrm>
+            <a:off x="640080" y="5669280"/>
+            <a:ext cx="10881360" cy="548640"/>
+          </a:xfrm>
+          <a:prstGeom prst="rect">
+            <a:avLst/>
+          </a:prstGeom>
+          <a:noFill/>
+        </p:spPr>
+        <p:txBody>
+          <a:bodyPr wrap="square">
+            <a:spAutoFit/>
+          </a:bodyPr>
+          <a:lstStyle/>
+          <a:p>
+            <a:pPr algn="l"/>
+            <a:r>
+              <a:rPr sz="1150" b="0" i="1">
+                <a:solidFill>
+                  <a:srgbClr val="4A5568"/>
+                </a:solidFill>
+                <a:latin typeface="Calibri"/>
+              </a:rPr>
+              <a:t>Metodologia: identificação de candidatos + verificação independente de cada achado contra critérios de falso-positivo, com corte em confiança ≥ 8/10 — inspirado em ferramentas de análise de postura de segurança em nuvem (ex.: Orca Security).</a:t>
+            </a:r>
+          </a:p>
+        </p:txBody>
+      </p:sp>
+      <p:sp>
+        <p:nvSpPr>
+          <p:cNvPr id="9" name="TextBox 8"/>
+          <p:cNvSpPr txBox="1"/>
+          <p:nvPr/>
+        </p:nvSpPr>
+        <p:spPr>
+          <a:xfrm>
+            <a:off x="640080" y="6473952"/>
+            <a:ext cx="5486400" cy="320040"/>
+          </a:xfrm>
+          <a:prstGeom prst="rect">
+            <a:avLst/>
+          </a:prstGeom>
+          <a:noFill/>
+        </p:spPr>
+        <p:txBody>
+          <a:bodyPr wrap="square">
+            <a:spAutoFit/>
+          </a:bodyPr>
+          <a:lstStyle/>
+          <a:p>
+            <a:pPr algn="l"/>
+            <a:r>
+              <a:rPr sz="900" b="0" i="0">
+                <a:solidFill>
+                  <a:srgbClr val="6B7A99"/>
+                </a:solidFill>
+                <a:latin typeface="Calibri"/>
+              </a:rPr>
+              <a:t>Analytic Eyes — Plataforma de Orquestração de Pipelines ETL</a:t>
+            </a:r>
+          </a:p>
+        </p:txBody>
+      </p:sp>
+      <p:sp>
+        <p:nvSpPr>
+          <p:cNvPr id="10" name="TextBox 9"/>
+          <p:cNvSpPr txBox="1"/>
+          <p:nvPr/>
+        </p:nvSpPr>
+        <p:spPr>
+          <a:xfrm>
+            <a:off x="10972800" y="6473952"/>
+            <a:ext cx="731520" cy="320040"/>
+          </a:xfrm>
+          <a:prstGeom prst="rect">
+            <a:avLst/>
+          </a:prstGeom>
+          <a:noFill/>
+        </p:spPr>
+        <p:txBody>
+          <a:bodyPr wrap="square">
+            <a:spAutoFit/>
+          </a:bodyPr>
+          <a:lstStyle/>
+          <a:p>
+            <a:pPr algn="r"/>
+            <a:r>
+              <a:rPr sz="900" b="0" i="0">
+                <a:solidFill>
+                  <a:srgbClr val="6B7A99"/>
+                </a:solidFill>
+                <a:latin typeface="Calibri"/>
+              </a:rPr>
+              <a:t>17</a:t>
+            </a:r>
+          </a:p>
+        </p:txBody>
+      </p:sp>
+    </p:spTree>
+  </p:cSld>
+  <p:clrMapOvr>
+    <a:masterClrMapping/>
+  </p:clrMapOvr>
+</p:sld>
+</file>
+
+<file path=ppt/slides/slide18.xml><?xml version="1.0" encoding="utf-8"?>
+<p:sld xmlns:a="http://schemas.openxmlformats.org/drawingml/2006/main" xmlns:p="http://schemas.openxmlformats.org/presentationml/2006/main" xmlns:r="http://schemas.openxmlformats.org/officeDocument/2006/relationships">
+  <p:cSld>
+    <p:bg>
+      <p:bgPr>
+        <a:solidFill>
+          <a:srgbClr val="FFFFFF"/>
+        </a:solidFill>
+        <a:effectLst/>
+      </p:bgPr>
+    </p:bg>
+    <p:spTree>
+      <p:nvGrpSpPr>
+        <p:cNvPr id="1" name=""/>
+        <p:cNvGrpSpPr/>
+        <p:nvPr/>
+      </p:nvGrpSpPr>
+      <p:grpSpPr/>
+      <p:sp>
+        <p:nvSpPr>
+          <p:cNvPr id="2" name="Rectangle 1"/>
+          <p:cNvSpPr/>
+          <p:nvPr/>
+        </p:nvSpPr>
+        <p:spPr>
+          <a:xfrm>
+            <a:off x="0" y="0"/>
+            <a:ext cx="12191695" cy="109728"/>
+          </a:xfrm>
+          <a:prstGeom prst="rect">
+            <a:avLst/>
+          </a:prstGeom>
+          <a:solidFill>
+            <a:srgbClr val="1F6FEB"/>
+          </a:solidFill>
+          <a:ln>
+            <a:noFill/>
+          </a:ln>
+          <a:effectLst/>
+        </p:spPr>
+        <p:style>
+          <a:lnRef idx="1">
+            <a:schemeClr val="accent1"/>
+          </a:lnRef>
+          <a:fillRef idx="3">
+            <a:schemeClr val="accent1"/>
+          </a:fillRef>
+          <a:effectRef idx="2">
+            <a:schemeClr val="accent1"/>
+          </a:effectRef>
+          <a:fontRef idx="minor">
+            <a:schemeClr val="lt1"/>
+          </a:fontRef>
+        </p:style>
+        <p:txBody>
+          <a:bodyPr rtlCol="0" anchor="ctr"/>
+          <a:lstStyle/>
+          <a:p>
+            <a:pPr algn="ctr"/>
+          </a:p>
+        </p:txBody>
+      </p:sp>
+      <p:sp>
+        <p:nvSpPr>
+          <p:cNvPr id="3" name="TextBox 2"/>
+          <p:cNvSpPr txBox="1"/>
+          <p:nvPr/>
+        </p:nvSpPr>
+        <p:spPr>
+          <a:xfrm>
+            <a:off x="640080" y="320040"/>
+            <a:ext cx="9144000" cy="365760"/>
+          </a:xfrm>
+          <a:prstGeom prst="rect">
+            <a:avLst/>
+          </a:prstGeom>
+          <a:noFill/>
+        </p:spPr>
+        <p:txBody>
+          <a:bodyPr wrap="square">
+            <a:spAutoFit/>
+          </a:bodyPr>
+          <a:lstStyle/>
+          <a:p>
+            <a:pPr algn="l"/>
+            <a:r>
+              <a:rPr sz="1300" b="1" i="0">
+                <a:solidFill>
+                  <a:srgbClr val="1F6FEB"/>
+                </a:solidFill>
+                <a:latin typeface="Calibri"/>
+              </a:rPr>
+              <a:t>ATUALIZAÇÃO</a:t>
+            </a:r>
+          </a:p>
+        </p:txBody>
+      </p:sp>
+      <p:sp>
+        <p:nvSpPr>
+          <p:cNvPr id="4" name="TextBox 3"/>
+          <p:cNvSpPr txBox="1"/>
+          <p:nvPr/>
+        </p:nvSpPr>
+        <p:spPr>
+          <a:xfrm>
+            <a:off x="640080" y="640080"/>
+            <a:ext cx="10789920" cy="822960"/>
+          </a:xfrm>
+          <a:prstGeom prst="rect">
+            <a:avLst/>
+          </a:prstGeom>
+          <a:noFill/>
+        </p:spPr>
+        <p:txBody>
+          <a:bodyPr wrap="square">
+            <a:spAutoFit/>
+          </a:bodyPr>
+          <a:lstStyle/>
+          <a:p>
+            <a:pPr algn="l"/>
+            <a:r>
+              <a:rPr sz="3000" b="1" i="0">
+                <a:solidFill>
+                  <a:srgbClr val="0F213B"/>
+                </a:solidFill>
+                <a:latin typeface="Calibri"/>
+              </a:rPr>
+              <a:t>Telas de Acesso Negado (401) e Não Encontrado (404)</a:t>
+            </a:r>
+          </a:p>
+        </p:txBody>
+      </p:sp>
+      <p:sp>
+        <p:nvSpPr>
+          <p:cNvPr id="5" name="Rectangle 4"/>
+          <p:cNvSpPr/>
+          <p:nvPr/>
+        </p:nvSpPr>
+        <p:spPr>
+          <a:xfrm>
+            <a:off x="640080" y="1417320"/>
+            <a:ext cx="1005840" cy="38100"/>
+          </a:xfrm>
+          <a:prstGeom prst="rect">
+            <a:avLst/>
+          </a:prstGeom>
+          <a:solidFill>
+            <a:srgbClr val="1F6FEB"/>
+          </a:solidFill>
+          <a:ln>
+            <a:noFill/>
+          </a:ln>
+          <a:effectLst/>
+        </p:spPr>
+        <p:style>
+          <a:lnRef idx="1">
+            <a:schemeClr val="accent1"/>
+          </a:lnRef>
+          <a:fillRef idx="3">
+            <a:schemeClr val="accent1"/>
+          </a:fillRef>
+          <a:effectRef idx="2">
+            <a:schemeClr val="accent1"/>
+          </a:effectRef>
+          <a:fontRef idx="minor">
+            <a:schemeClr val="lt1"/>
+          </a:fontRef>
+        </p:style>
+        <p:txBody>
+          <a:bodyPr rtlCol="0" anchor="ctr"/>
+          <a:lstStyle/>
+          <a:p>
+            <a:pPr algn="ctr"/>
+          </a:p>
+        </p:txBody>
+      </p:sp>
+      <p:sp>
+        <p:nvSpPr>
+          <p:cNvPr id="6" name="TextBox 5"/>
+          <p:cNvSpPr txBox="1"/>
+          <p:nvPr/>
+        </p:nvSpPr>
+        <p:spPr>
+          <a:xfrm>
+            <a:off x="640080" y="1691640"/>
+            <a:ext cx="10789920" cy="640080"/>
+          </a:xfrm>
+          <a:prstGeom prst="rect">
+            <a:avLst/>
+          </a:prstGeom>
+          <a:noFill/>
+        </p:spPr>
+        <p:txBody>
+          <a:bodyPr wrap="square">
+            <a:spAutoFit/>
+          </a:bodyPr>
+          <a:lstStyle/>
+          <a:p>
+            <a:pPr algn="l"/>
+            <a:r>
+              <a:rPr sz="1450" b="0" i="0">
+                <a:solidFill>
+                  <a:srgbClr val="4A5568"/>
+                </a:solidFill>
+                <a:latin typeface="Calibri"/>
+              </a:rPr>
+              <a:t>Antes, uma rota inexistente ou uma sessão expirada simplesmente redirecionava sem explicação. Agora existe uma tela dedicada, com animação, para cada caso.</a:t>
+            </a:r>
+          </a:p>
+        </p:txBody>
+      </p:sp>
+      <p:sp>
+        <p:nvSpPr>
+          <p:cNvPr id="7" name="Rectangle 6"/>
+          <p:cNvSpPr/>
+          <p:nvPr/>
+        </p:nvSpPr>
+        <p:spPr>
+          <a:xfrm>
+            <a:off x="640080" y="2606040"/>
+            <a:ext cx="5257800" cy="2103120"/>
+          </a:xfrm>
+          <a:prstGeom prst="rect">
+            <a:avLst/>
+          </a:prstGeom>
+          <a:solidFill>
+            <a:srgbClr val="E8F1FD"/>
+          </a:solidFill>
+          <a:ln>
+            <a:noFill/>
+          </a:ln>
+          <a:effectLst/>
+        </p:spPr>
+        <p:style>
+          <a:lnRef idx="1">
+            <a:schemeClr val="accent1"/>
+          </a:lnRef>
+          <a:fillRef idx="3">
+            <a:schemeClr val="accent1"/>
+          </a:fillRef>
+          <a:effectRef idx="2">
+            <a:schemeClr val="accent1"/>
+          </a:effectRef>
+          <a:fontRef idx="minor">
+            <a:schemeClr val="lt1"/>
+          </a:fontRef>
+        </p:style>
+        <p:txBody>
+          <a:bodyPr rtlCol="0" anchor="ctr"/>
+          <a:lstStyle/>
+          <a:p>
+            <a:pPr algn="ctr"/>
+          </a:p>
+        </p:txBody>
+      </p:sp>
+      <p:sp>
+        <p:nvSpPr>
+          <p:cNvPr id="8" name="Rectangle 7"/>
+          <p:cNvSpPr/>
+          <p:nvPr/>
+        </p:nvSpPr>
+        <p:spPr>
+          <a:xfrm>
+            <a:off x="640080" y="2606040"/>
+            <a:ext cx="5257800" cy="73152"/>
+          </a:xfrm>
+          <a:prstGeom prst="rect">
+            <a:avLst/>
+          </a:prstGeom>
+          <a:solidFill>
+            <a:srgbClr val="1F6FEB"/>
+          </a:solidFill>
+          <a:ln>
+            <a:noFill/>
+          </a:ln>
+          <a:effectLst/>
+        </p:spPr>
+        <p:style>
+          <a:lnRef idx="1">
+            <a:schemeClr val="accent1"/>
+          </a:lnRef>
+          <a:fillRef idx="3">
+            <a:schemeClr val="accent1"/>
+          </a:fillRef>
+          <a:effectRef idx="2">
+            <a:schemeClr val="accent1"/>
+          </a:effectRef>
+          <a:fontRef idx="minor">
+            <a:schemeClr val="lt1"/>
+          </a:fontRef>
+        </p:style>
+        <p:txBody>
+          <a:bodyPr rtlCol="0" anchor="ctr"/>
+          <a:lstStyle/>
+          <a:p>
+            <a:pPr algn="ctr"/>
+          </a:p>
+        </p:txBody>
+      </p:sp>
+      <p:sp>
+        <p:nvSpPr>
+          <p:cNvPr id="9" name="TextBox 8"/>
+          <p:cNvSpPr txBox="1"/>
+          <p:nvPr/>
+        </p:nvSpPr>
+        <p:spPr>
+          <a:xfrm>
+            <a:off x="868680" y="2788920"/>
+            <a:ext cx="4800600" cy="457200"/>
+          </a:xfrm>
+          <a:prstGeom prst="rect">
+            <a:avLst/>
+          </a:prstGeom>
+          <a:noFill/>
+        </p:spPr>
+        <p:txBody>
+          <a:bodyPr wrap="square">
+            <a:spAutoFit/>
+          </a:bodyPr>
+          <a:lstStyle/>
+          <a:p>
+            <a:pPr algn="l"/>
+            <a:r>
+              <a:rPr sz="1500" b="1" i="0">
+                <a:solidFill>
+                  <a:srgbClr val="0F213B"/>
+                </a:solidFill>
+                <a:latin typeface="Calibri"/>
+              </a:rPr>
+              <a:t>401 — Não autenticado</a:t>
+            </a:r>
+          </a:p>
+        </p:txBody>
+      </p:sp>
+      <p:sp>
+        <p:nvSpPr>
+          <p:cNvPr id="10" name="TextBox 9"/>
+          <p:cNvSpPr txBox="1"/>
+          <p:nvPr/>
+        </p:nvSpPr>
+        <p:spPr>
+          <a:xfrm>
+            <a:off x="868680" y="3246120"/>
+            <a:ext cx="4800600" cy="1371600"/>
+          </a:xfrm>
+          <a:prstGeom prst="rect">
+            <a:avLst/>
+          </a:prstGeom>
+          <a:noFill/>
+        </p:spPr>
+        <p:txBody>
+          <a:bodyPr wrap="square">
+            <a:spAutoFit/>
+          </a:bodyPr>
+          <a:lstStyle/>
+          <a:p>
+            <a:pPr algn="l"/>
+            <a:r>
+              <a:rPr sz="1200" b="0" i="0">
+                <a:solidFill>
+                  <a:srgbClr val="4A5568"/>
+                </a:solidFill>
+                <a:latin typeface="Calibri"/>
+              </a:rPr>
+              <a:t>Exibida quando o token de acesso não existe ou expirou (ex.: tentar acessar /settings sem estar logado). Mostra contagem regressiva e redireciona automaticamente para o login.</a:t>
+            </a:r>
+          </a:p>
+        </p:txBody>
+      </p:sp>
+      <p:sp>
+        <p:nvSpPr>
+          <p:cNvPr id="11" name="Rectangle 10"/>
+          <p:cNvSpPr/>
+          <p:nvPr/>
+        </p:nvSpPr>
+        <p:spPr>
+          <a:xfrm>
+            <a:off x="6126480" y="2606040"/>
+            <a:ext cx="5257800" cy="2103120"/>
+          </a:xfrm>
+          <a:prstGeom prst="rect">
+            <a:avLst/>
+          </a:prstGeom>
+          <a:solidFill>
+            <a:srgbClr val="E8F1FD"/>
+          </a:solidFill>
+          <a:ln>
+            <a:noFill/>
+          </a:ln>
+          <a:effectLst/>
+        </p:spPr>
+        <p:style>
+          <a:lnRef idx="1">
+            <a:schemeClr val="accent1"/>
+          </a:lnRef>
+          <a:fillRef idx="3">
+            <a:schemeClr val="accent1"/>
+          </a:fillRef>
+          <a:effectRef idx="2">
+            <a:schemeClr val="accent1"/>
+          </a:effectRef>
+          <a:fontRef idx="minor">
+            <a:schemeClr val="lt1"/>
+          </a:fontRef>
+        </p:style>
+        <p:txBody>
+          <a:bodyPr rtlCol="0" anchor="ctr"/>
+          <a:lstStyle/>
+          <a:p>
+            <a:pPr algn="ctr"/>
+          </a:p>
+        </p:txBody>
+      </p:sp>
+      <p:sp>
+        <p:nvSpPr>
+          <p:cNvPr id="12" name="Rectangle 11"/>
+          <p:cNvSpPr/>
+          <p:nvPr/>
+        </p:nvSpPr>
+        <p:spPr>
+          <a:xfrm>
+            <a:off x="6126480" y="2606040"/>
+            <a:ext cx="5257800" cy="73152"/>
+          </a:xfrm>
+          <a:prstGeom prst="rect">
+            <a:avLst/>
+          </a:prstGeom>
+          <a:solidFill>
+            <a:srgbClr val="1F6FEB"/>
+          </a:solidFill>
+          <a:ln>
+            <a:noFill/>
+          </a:ln>
+          <a:effectLst/>
+        </p:spPr>
+        <p:style>
+          <a:lnRef idx="1">
+            <a:schemeClr val="accent1"/>
+          </a:lnRef>
+          <a:fillRef idx="3">
+            <a:schemeClr val="accent1"/>
+          </a:fillRef>
+          <a:effectRef idx="2">
+            <a:schemeClr val="accent1"/>
+          </a:effectRef>
+          <a:fontRef idx="minor">
+            <a:schemeClr val="lt1"/>
+          </a:fontRef>
+        </p:style>
+        <p:txBody>
+          <a:bodyPr rtlCol="0" anchor="ctr"/>
+          <a:lstStyle/>
+          <a:p>
+            <a:pPr algn="ctr"/>
+          </a:p>
+        </p:txBody>
+      </p:sp>
+      <p:sp>
+        <p:nvSpPr>
+          <p:cNvPr id="13" name="TextBox 12"/>
+          <p:cNvSpPr txBox="1"/>
+          <p:nvPr/>
+        </p:nvSpPr>
+        <p:spPr>
+          <a:xfrm>
+            <a:off x="6355080" y="2788920"/>
+            <a:ext cx="4800600" cy="457200"/>
+          </a:xfrm>
+          <a:prstGeom prst="rect">
+            <a:avLst/>
+          </a:prstGeom>
+          <a:noFill/>
+        </p:spPr>
+        <p:txBody>
+          <a:bodyPr wrap="square">
+            <a:spAutoFit/>
+          </a:bodyPr>
+          <a:lstStyle/>
+          <a:p>
+            <a:pPr algn="l"/>
+            <a:r>
+              <a:rPr sz="1500" b="1" i="0">
+                <a:solidFill>
+                  <a:srgbClr val="0F213B"/>
+                </a:solidFill>
+                <a:latin typeface="Calibri"/>
+              </a:rPr>
+              <a:t>404 — Página não encontrada</a:t>
+            </a:r>
+          </a:p>
+        </p:txBody>
+      </p:sp>
+      <p:sp>
+        <p:nvSpPr>
+          <p:cNvPr id="14" name="TextBox 13"/>
+          <p:cNvSpPr txBox="1"/>
+          <p:nvPr/>
+        </p:nvSpPr>
+        <p:spPr>
+          <a:xfrm>
+            <a:off x="6355080" y="3246120"/>
+            <a:ext cx="4800600" cy="1371600"/>
+          </a:xfrm>
+          <a:prstGeom prst="rect">
+            <a:avLst/>
+          </a:prstGeom>
+          <a:noFill/>
+        </p:spPr>
+        <p:txBody>
+          <a:bodyPr wrap="square">
+            <a:spAutoFit/>
+          </a:bodyPr>
+          <a:lstStyle/>
+          <a:p>
+            <a:pPr algn="l"/>
+            <a:r>
+              <a:rPr sz="1200" b="0" i="0">
+                <a:solidFill>
+                  <a:srgbClr val="4A5568"/>
+                </a:solidFill>
+                <a:latin typeface="Calibri"/>
+              </a:rPr>
+              <a:t>Exibida para qualquer endereço que não corresponde a nenhuma rota da aplicação, com botão de retorno à tela inicial.</a:t>
+            </a:r>
+          </a:p>
+        </p:txBody>
+      </p:sp>
+      <p:sp>
+        <p:nvSpPr>
+          <p:cNvPr id="15" name="TextBox 14"/>
+          <p:cNvSpPr txBox="1"/>
+          <p:nvPr/>
+        </p:nvSpPr>
+        <p:spPr>
+          <a:xfrm>
+            <a:off x="640080" y="5029200"/>
+            <a:ext cx="10789920" cy="457200"/>
+          </a:xfrm>
+          <a:prstGeom prst="rect">
+            <a:avLst/>
+          </a:prstGeom>
+          <a:noFill/>
+        </p:spPr>
+        <p:txBody>
+          <a:bodyPr wrap="square">
+            <a:spAutoFit/>
+          </a:bodyPr>
+          <a:lstStyle/>
+          <a:p>
+            <a:pPr algn="l"/>
+            <a:r>
+              <a:rPr sz="1200" b="0" i="1">
+                <a:solidFill>
+                  <a:srgbClr val="4A5568"/>
+                </a:solidFill>
+                <a:latin typeface="Calibri"/>
+              </a:rPr>
+              <a:t>Ambas as telas foram validadas visualmente (Playwright, ambiente real) antes da entrega.</a:t>
+            </a:r>
+          </a:p>
+        </p:txBody>
+      </p:sp>
+      <p:sp>
+        <p:nvSpPr>
+          <p:cNvPr id="16" name="TextBox 15"/>
+          <p:cNvSpPr txBox="1"/>
+          <p:nvPr/>
+        </p:nvSpPr>
+        <p:spPr>
+          <a:xfrm>
+            <a:off x="640080" y="6473952"/>
+            <a:ext cx="5486400" cy="320040"/>
+          </a:xfrm>
+          <a:prstGeom prst="rect">
+            <a:avLst/>
+          </a:prstGeom>
+          <a:noFill/>
+        </p:spPr>
+        <p:txBody>
+          <a:bodyPr wrap="square">
+            <a:spAutoFit/>
+          </a:bodyPr>
+          <a:lstStyle/>
+          <a:p>
+            <a:pPr algn="l"/>
+            <a:r>
+              <a:rPr sz="900" b="0" i="0">
+                <a:solidFill>
+                  <a:srgbClr val="6B7A99"/>
+                </a:solidFill>
+                <a:latin typeface="Calibri"/>
+              </a:rPr>
+              <a:t>Analytic Eyes — Plataforma de Orquestração de Pipelines ETL</a:t>
+            </a:r>
+          </a:p>
+        </p:txBody>
+      </p:sp>
+      <p:sp>
+        <p:nvSpPr>
+          <p:cNvPr id="17" name="TextBox 16"/>
+          <p:cNvSpPr txBox="1"/>
+          <p:nvPr/>
+        </p:nvSpPr>
+        <p:spPr>
+          <a:xfrm>
+            <a:off x="10972800" y="6473952"/>
+            <a:ext cx="731520" cy="320040"/>
+          </a:xfrm>
+          <a:prstGeom prst="rect">
+            <a:avLst/>
+          </a:prstGeom>
+          <a:noFill/>
+        </p:spPr>
+        <p:txBody>
+          <a:bodyPr wrap="square">
+            <a:spAutoFit/>
+          </a:bodyPr>
+          <a:lstStyle/>
+          <a:p>
+            <a:pPr algn="r"/>
+            <a:r>
+              <a:rPr sz="900" b="0" i="0">
+                <a:solidFill>
+                  <a:srgbClr val="6B7A99"/>
+                </a:solidFill>
+                <a:latin typeface="Calibri"/>
+              </a:rPr>
+              <a:t>18</a:t>
+            </a:r>
+          </a:p>
+        </p:txBody>
+      </p:sp>
+    </p:spTree>
+  </p:cSld>
+  <p:clrMapOvr>
+    <a:masterClrMapping/>
+  </p:clrMapOvr>
+</p:sld>
+</file>
+
+<file path=ppt/slides/slide19.xml><?xml version="1.0" encoding="utf-8"?>
+<p:sld xmlns:a="http://schemas.openxmlformats.org/drawingml/2006/main" xmlns:p="http://schemas.openxmlformats.org/presentationml/2006/main" xmlns:r="http://schemas.openxmlformats.org/officeDocument/2006/relationships">
+  <p:cSld>
+    <p:bg>
+      <p:bgPr>
+        <a:solidFill>
+          <a:srgbClr val="FFFFFF"/>
+        </a:solidFill>
+        <a:effectLst/>
+      </p:bgPr>
+    </p:bg>
+    <p:spTree>
+      <p:nvGrpSpPr>
+        <p:cNvPr id="1" name=""/>
+        <p:cNvGrpSpPr/>
+        <p:nvPr/>
+      </p:nvGrpSpPr>
+      <p:grpSpPr/>
+      <p:sp>
+        <p:nvSpPr>
+          <p:cNvPr id="2" name="Rectangle 1"/>
+          <p:cNvSpPr/>
+          <p:nvPr/>
+        </p:nvSpPr>
+        <p:spPr>
+          <a:xfrm>
+            <a:off x="0" y="0"/>
+            <a:ext cx="12191695" cy="109728"/>
+          </a:xfrm>
+          <a:prstGeom prst="rect">
+            <a:avLst/>
+          </a:prstGeom>
+          <a:solidFill>
+            <a:srgbClr val="1F6FEB"/>
+          </a:solidFill>
+          <a:ln>
+            <a:noFill/>
+          </a:ln>
+          <a:effectLst/>
+        </p:spPr>
+        <p:style>
+          <a:lnRef idx="1">
+            <a:schemeClr val="accent1"/>
+          </a:lnRef>
+          <a:fillRef idx="3">
+            <a:schemeClr val="accent1"/>
+          </a:fillRef>
+          <a:effectRef idx="2">
+            <a:schemeClr val="accent1"/>
+          </a:effectRef>
+          <a:fontRef idx="minor">
+            <a:schemeClr val="lt1"/>
+          </a:fontRef>
+        </p:style>
+        <p:txBody>
+          <a:bodyPr rtlCol="0" anchor="ctr"/>
+          <a:lstStyle/>
+          <a:p>
+            <a:pPr algn="ctr"/>
+          </a:p>
+        </p:txBody>
+      </p:sp>
+      <p:sp>
+        <p:nvSpPr>
+          <p:cNvPr id="3" name="TextBox 2"/>
+          <p:cNvSpPr txBox="1"/>
+          <p:nvPr/>
+        </p:nvSpPr>
+        <p:spPr>
+          <a:xfrm>
+            <a:off x="640080" y="320040"/>
+            <a:ext cx="9144000" cy="365760"/>
+          </a:xfrm>
+          <a:prstGeom prst="rect">
+            <a:avLst/>
+          </a:prstGeom>
+          <a:noFill/>
+        </p:spPr>
+        <p:txBody>
+          <a:bodyPr wrap="square">
+            <a:spAutoFit/>
+          </a:bodyPr>
+          <a:lstStyle/>
+          <a:p>
+            <a:pPr algn="l"/>
+            <a:r>
+              <a:rPr sz="1300" b="1" i="0">
+                <a:solidFill>
+                  <a:srgbClr val="1F6FEB"/>
+                </a:solidFill>
+                <a:latin typeface="Calibri"/>
+              </a:rPr>
+              <a:t>DIAGRAMAS TÉCNICOS</a:t>
+            </a:r>
+          </a:p>
+        </p:txBody>
+      </p:sp>
+      <p:sp>
+        <p:nvSpPr>
+          <p:cNvPr id="4" name="TextBox 3"/>
+          <p:cNvSpPr txBox="1"/>
+          <p:nvPr/>
+        </p:nvSpPr>
+        <p:spPr>
+          <a:xfrm>
+            <a:off x="640080" y="640080"/>
+            <a:ext cx="10789920" cy="822960"/>
+          </a:xfrm>
+          <a:prstGeom prst="rect">
+            <a:avLst/>
+          </a:prstGeom>
+          <a:noFill/>
+        </p:spPr>
+        <p:txBody>
+          <a:bodyPr wrap="square">
+            <a:spAutoFit/>
+          </a:bodyPr>
+          <a:lstStyle/>
+          <a:p>
+            <a:pPr algn="l"/>
+            <a:r>
+              <a:rPr sz="3000" b="1" i="0">
+                <a:solidFill>
+                  <a:srgbClr val="0F213B"/>
+                </a:solidFill>
+                <a:latin typeface="Calibri"/>
+              </a:rPr>
+              <a:t>Fluxo de Funcionamento da Aplicação</a:t>
+            </a:r>
+          </a:p>
+        </p:txBody>
+      </p:sp>
+      <p:sp>
+        <p:nvSpPr>
+          <p:cNvPr id="5" name="Rectangle 4"/>
+          <p:cNvSpPr/>
+          <p:nvPr/>
+        </p:nvSpPr>
+        <p:spPr>
+          <a:xfrm>
+            <a:off x="640080" y="1417320"/>
+            <a:ext cx="1005840" cy="38100"/>
+          </a:xfrm>
+          <a:prstGeom prst="rect">
+            <a:avLst/>
+          </a:prstGeom>
+          <a:solidFill>
+            <a:srgbClr val="1F6FEB"/>
+          </a:solidFill>
+          <a:ln>
+            <a:noFill/>
+          </a:ln>
+          <a:effectLst/>
+        </p:spPr>
+        <p:style>
+          <a:lnRef idx="1">
+            <a:schemeClr val="accent1"/>
+          </a:lnRef>
+          <a:fillRef idx="3">
+            <a:schemeClr val="accent1"/>
+          </a:fillRef>
+          <a:effectRef idx="2">
+            <a:schemeClr val="accent1"/>
+          </a:effectRef>
+          <a:fontRef idx="minor">
+            <a:schemeClr val="lt1"/>
+          </a:fontRef>
+        </p:style>
+        <p:txBody>
+          <a:bodyPr rtlCol="0" anchor="ctr"/>
+          <a:lstStyle/>
+          <a:p>
+            <a:pPr algn="ctr"/>
+          </a:p>
+        </p:txBody>
+      </p:sp>
+      <p:pic>
+        <p:nvPicPr>
+          <p:cNvPr id="6" name="Picture 5" descr="diagrama-funcionamento-aplicacao.png"/>
+          <p:cNvPicPr>
+            <a:picLocks noChangeAspect="1"/>
+          </p:cNvPicPr>
+          <p:nvPr/>
+        </p:nvPicPr>
+        <p:blipFill>
+          <a:blip r:embed="rId2"/>
+          <a:stretch>
+            <a:fillRect/>
+          </a:stretch>
+        </p:blipFill>
+        <p:spPr>
+          <a:xfrm>
+            <a:off x="1478723" y="1691640"/>
+            <a:ext cx="9234249" cy="4846320"/>
+          </a:xfrm>
+          <a:prstGeom prst="rect">
+            <a:avLst/>
+          </a:prstGeom>
+        </p:spPr>
+      </p:pic>
+      <p:sp>
+        <p:nvSpPr>
+          <p:cNvPr id="7" name="TextBox 6"/>
+          <p:cNvSpPr txBox="1"/>
+          <p:nvPr/>
+        </p:nvSpPr>
+        <p:spPr>
+          <a:xfrm>
+            <a:off x="640080" y="6473952"/>
+            <a:ext cx="5486400" cy="320040"/>
+          </a:xfrm>
+          <a:prstGeom prst="rect">
+            <a:avLst/>
+          </a:prstGeom>
+          <a:noFill/>
+        </p:spPr>
+        <p:txBody>
+          <a:bodyPr wrap="square">
+            <a:spAutoFit/>
+          </a:bodyPr>
+          <a:lstStyle/>
+          <a:p>
+            <a:pPr algn="l"/>
+            <a:r>
+              <a:rPr sz="900" b="0" i="0">
+                <a:solidFill>
+                  <a:srgbClr val="6B7A99"/>
+                </a:solidFill>
+                <a:latin typeface="Calibri"/>
+              </a:rPr>
+              <a:t>Analytic Eyes — Plataforma de Orquestração de Pipelines ETL</a:t>
+            </a:r>
+          </a:p>
+        </p:txBody>
+      </p:sp>
+      <p:sp>
+        <p:nvSpPr>
+          <p:cNvPr id="8" name="TextBox 7"/>
+          <p:cNvSpPr txBox="1"/>
+          <p:nvPr/>
+        </p:nvSpPr>
+        <p:spPr>
+          <a:xfrm>
+            <a:off x="10972800" y="6473952"/>
+            <a:ext cx="731520" cy="320040"/>
+          </a:xfrm>
+          <a:prstGeom prst="rect">
+            <a:avLst/>
+          </a:prstGeom>
+          <a:noFill/>
+        </p:spPr>
+        <p:txBody>
+          <a:bodyPr wrap="square">
+            <a:spAutoFit/>
+          </a:bodyPr>
+          <a:lstStyle/>
+          <a:p>
+            <a:pPr algn="r"/>
+            <a:r>
+              <a:rPr sz="900" b="0" i="0">
+                <a:solidFill>
+                  <a:srgbClr val="6B7A99"/>
+                </a:solidFill>
+                <a:latin typeface="Calibri"/>
+              </a:rPr>
+              <a:t>19</a:t>
             </a:r>
           </a:p>
         </p:txBody>
@@ -7444,6 +9294,737 @@
                 <a:latin typeface="Calibri"/>
               </a:rPr>
               <a:t>2</a:t>
+            </a:r>
+          </a:p>
+        </p:txBody>
+      </p:sp>
+    </p:spTree>
+  </p:cSld>
+  <p:clrMapOvr>
+    <a:masterClrMapping/>
+  </p:clrMapOvr>
+</p:sld>
+</file>
+
+<file path=ppt/slides/slide20.xml><?xml version="1.0" encoding="utf-8"?>
+<p:sld xmlns:a="http://schemas.openxmlformats.org/drawingml/2006/main" xmlns:p="http://schemas.openxmlformats.org/presentationml/2006/main" xmlns:r="http://schemas.openxmlformats.org/officeDocument/2006/relationships">
+  <p:cSld>
+    <p:bg>
+      <p:bgPr>
+        <a:solidFill>
+          <a:srgbClr val="FFFFFF"/>
+        </a:solidFill>
+        <a:effectLst/>
+      </p:bgPr>
+    </p:bg>
+    <p:spTree>
+      <p:nvGrpSpPr>
+        <p:cNvPr id="1" name=""/>
+        <p:cNvGrpSpPr/>
+        <p:nvPr/>
+      </p:nvGrpSpPr>
+      <p:grpSpPr/>
+      <p:sp>
+        <p:nvSpPr>
+          <p:cNvPr id="2" name="Rectangle 1"/>
+          <p:cNvSpPr/>
+          <p:nvPr/>
+        </p:nvSpPr>
+        <p:spPr>
+          <a:xfrm>
+            <a:off x="0" y="0"/>
+            <a:ext cx="12191695" cy="109728"/>
+          </a:xfrm>
+          <a:prstGeom prst="rect">
+            <a:avLst/>
+          </a:prstGeom>
+          <a:solidFill>
+            <a:srgbClr val="1F6FEB"/>
+          </a:solidFill>
+          <a:ln>
+            <a:noFill/>
+          </a:ln>
+          <a:effectLst/>
+        </p:spPr>
+        <p:style>
+          <a:lnRef idx="1">
+            <a:schemeClr val="accent1"/>
+          </a:lnRef>
+          <a:fillRef idx="3">
+            <a:schemeClr val="accent1"/>
+          </a:fillRef>
+          <a:effectRef idx="2">
+            <a:schemeClr val="accent1"/>
+          </a:effectRef>
+          <a:fontRef idx="minor">
+            <a:schemeClr val="lt1"/>
+          </a:fontRef>
+        </p:style>
+        <p:txBody>
+          <a:bodyPr rtlCol="0" anchor="ctr"/>
+          <a:lstStyle/>
+          <a:p>
+            <a:pPr algn="ctr"/>
+          </a:p>
+        </p:txBody>
+      </p:sp>
+      <p:sp>
+        <p:nvSpPr>
+          <p:cNvPr id="3" name="TextBox 2"/>
+          <p:cNvSpPr txBox="1"/>
+          <p:nvPr/>
+        </p:nvSpPr>
+        <p:spPr>
+          <a:xfrm>
+            <a:off x="640080" y="320040"/>
+            <a:ext cx="9144000" cy="365760"/>
+          </a:xfrm>
+          <a:prstGeom prst="rect">
+            <a:avLst/>
+          </a:prstGeom>
+          <a:noFill/>
+        </p:spPr>
+        <p:txBody>
+          <a:bodyPr wrap="square">
+            <a:spAutoFit/>
+          </a:bodyPr>
+          <a:lstStyle/>
+          <a:p>
+            <a:pPr algn="l"/>
+            <a:r>
+              <a:rPr sz="1300" b="1" i="0">
+                <a:solidFill>
+                  <a:srgbClr val="1F6FEB"/>
+                </a:solidFill>
+                <a:latin typeface="Calibri"/>
+              </a:rPr>
+              <a:t>DIAGRAMAS TÉCNICOS</a:t>
+            </a:r>
+          </a:p>
+        </p:txBody>
+      </p:sp>
+      <p:sp>
+        <p:nvSpPr>
+          <p:cNvPr id="4" name="TextBox 3"/>
+          <p:cNvSpPr txBox="1"/>
+          <p:nvPr/>
+        </p:nvSpPr>
+        <p:spPr>
+          <a:xfrm>
+            <a:off x="640080" y="640080"/>
+            <a:ext cx="10789920" cy="822960"/>
+          </a:xfrm>
+          <a:prstGeom prst="rect">
+            <a:avLst/>
+          </a:prstGeom>
+          <a:noFill/>
+        </p:spPr>
+        <p:txBody>
+          <a:bodyPr wrap="square">
+            <a:spAutoFit/>
+          </a:bodyPr>
+          <a:lstStyle/>
+          <a:p>
+            <a:pPr algn="l"/>
+            <a:r>
+              <a:rPr sz="3000" b="1" i="0">
+                <a:solidFill>
+                  <a:srgbClr val="0F213B"/>
+                </a:solidFill>
+                <a:latin typeface="Calibri"/>
+              </a:rPr>
+              <a:t>Modelo de Dados (Banco de Dados)</a:t>
+            </a:r>
+          </a:p>
+        </p:txBody>
+      </p:sp>
+      <p:sp>
+        <p:nvSpPr>
+          <p:cNvPr id="5" name="Rectangle 4"/>
+          <p:cNvSpPr/>
+          <p:nvPr/>
+        </p:nvSpPr>
+        <p:spPr>
+          <a:xfrm>
+            <a:off x="640080" y="1417320"/>
+            <a:ext cx="1005840" cy="38100"/>
+          </a:xfrm>
+          <a:prstGeom prst="rect">
+            <a:avLst/>
+          </a:prstGeom>
+          <a:solidFill>
+            <a:srgbClr val="1F6FEB"/>
+          </a:solidFill>
+          <a:ln>
+            <a:noFill/>
+          </a:ln>
+          <a:effectLst/>
+        </p:spPr>
+        <p:style>
+          <a:lnRef idx="1">
+            <a:schemeClr val="accent1"/>
+          </a:lnRef>
+          <a:fillRef idx="3">
+            <a:schemeClr val="accent1"/>
+          </a:fillRef>
+          <a:effectRef idx="2">
+            <a:schemeClr val="accent1"/>
+          </a:effectRef>
+          <a:fontRef idx="minor">
+            <a:schemeClr val="lt1"/>
+          </a:fontRef>
+        </p:style>
+        <p:txBody>
+          <a:bodyPr rtlCol="0" anchor="ctr"/>
+          <a:lstStyle/>
+          <a:p>
+            <a:pPr algn="ctr"/>
+          </a:p>
+        </p:txBody>
+      </p:sp>
+      <p:pic>
+        <p:nvPicPr>
+          <p:cNvPr id="6" name="Picture 5" descr="diagrama-banco-de-dados.png"/>
+          <p:cNvPicPr>
+            <a:picLocks noChangeAspect="1"/>
+          </p:cNvPicPr>
+          <p:nvPr/>
+        </p:nvPicPr>
+        <p:blipFill>
+          <a:blip r:embed="rId2"/>
+          <a:stretch>
+            <a:fillRect/>
+          </a:stretch>
+        </p:blipFill>
+        <p:spPr>
+          <a:xfrm>
+            <a:off x="2374566" y="1691640"/>
+            <a:ext cx="7442562" cy="4846320"/>
+          </a:xfrm>
+          <a:prstGeom prst="rect">
+            <a:avLst/>
+          </a:prstGeom>
+        </p:spPr>
+      </p:pic>
+      <p:sp>
+        <p:nvSpPr>
+          <p:cNvPr id="7" name="TextBox 6"/>
+          <p:cNvSpPr txBox="1"/>
+          <p:nvPr/>
+        </p:nvSpPr>
+        <p:spPr>
+          <a:xfrm>
+            <a:off x="640080" y="6473952"/>
+            <a:ext cx="5486400" cy="320040"/>
+          </a:xfrm>
+          <a:prstGeom prst="rect">
+            <a:avLst/>
+          </a:prstGeom>
+          <a:noFill/>
+        </p:spPr>
+        <p:txBody>
+          <a:bodyPr wrap="square">
+            <a:spAutoFit/>
+          </a:bodyPr>
+          <a:lstStyle/>
+          <a:p>
+            <a:pPr algn="l"/>
+            <a:r>
+              <a:rPr sz="900" b="0" i="0">
+                <a:solidFill>
+                  <a:srgbClr val="6B7A99"/>
+                </a:solidFill>
+                <a:latin typeface="Calibri"/>
+              </a:rPr>
+              <a:t>Analytic Eyes — Plataforma de Orquestração de Pipelines ETL</a:t>
+            </a:r>
+          </a:p>
+        </p:txBody>
+      </p:sp>
+      <p:sp>
+        <p:nvSpPr>
+          <p:cNvPr id="8" name="TextBox 7"/>
+          <p:cNvSpPr txBox="1"/>
+          <p:nvPr/>
+        </p:nvSpPr>
+        <p:spPr>
+          <a:xfrm>
+            <a:off x="10972800" y="6473952"/>
+            <a:ext cx="731520" cy="320040"/>
+          </a:xfrm>
+          <a:prstGeom prst="rect">
+            <a:avLst/>
+          </a:prstGeom>
+          <a:noFill/>
+        </p:spPr>
+        <p:txBody>
+          <a:bodyPr wrap="square">
+            <a:spAutoFit/>
+          </a:bodyPr>
+          <a:lstStyle/>
+          <a:p>
+            <a:pPr algn="r"/>
+            <a:r>
+              <a:rPr sz="900" b="0" i="0">
+                <a:solidFill>
+                  <a:srgbClr val="6B7A99"/>
+                </a:solidFill>
+                <a:latin typeface="Calibri"/>
+              </a:rPr>
+              <a:t>20</a:t>
+            </a:r>
+          </a:p>
+        </p:txBody>
+      </p:sp>
+    </p:spTree>
+  </p:cSld>
+  <p:clrMapOvr>
+    <a:masterClrMapping/>
+  </p:clrMapOvr>
+</p:sld>
+</file>
+
+<file path=ppt/slides/slide21.xml><?xml version="1.0" encoding="utf-8"?>
+<p:sld xmlns:a="http://schemas.openxmlformats.org/drawingml/2006/main" xmlns:p="http://schemas.openxmlformats.org/presentationml/2006/main" xmlns:r="http://schemas.openxmlformats.org/officeDocument/2006/relationships">
+  <p:cSld>
+    <p:bg>
+      <p:bgPr>
+        <a:solidFill>
+          <a:srgbClr val="FFFFFF"/>
+        </a:solidFill>
+        <a:effectLst/>
+      </p:bgPr>
+    </p:bg>
+    <p:spTree>
+      <p:nvGrpSpPr>
+        <p:cNvPr id="1" name=""/>
+        <p:cNvGrpSpPr/>
+        <p:nvPr/>
+      </p:nvGrpSpPr>
+      <p:grpSpPr/>
+      <p:sp>
+        <p:nvSpPr>
+          <p:cNvPr id="2" name="Rectangle 1"/>
+          <p:cNvSpPr/>
+          <p:nvPr/>
+        </p:nvSpPr>
+        <p:spPr>
+          <a:xfrm>
+            <a:off x="0" y="0"/>
+            <a:ext cx="12191695" cy="109728"/>
+          </a:xfrm>
+          <a:prstGeom prst="rect">
+            <a:avLst/>
+          </a:prstGeom>
+          <a:solidFill>
+            <a:srgbClr val="1F6FEB"/>
+          </a:solidFill>
+          <a:ln>
+            <a:noFill/>
+          </a:ln>
+          <a:effectLst/>
+        </p:spPr>
+        <p:style>
+          <a:lnRef idx="1">
+            <a:schemeClr val="accent1"/>
+          </a:lnRef>
+          <a:fillRef idx="3">
+            <a:schemeClr val="accent1"/>
+          </a:fillRef>
+          <a:effectRef idx="2">
+            <a:schemeClr val="accent1"/>
+          </a:effectRef>
+          <a:fontRef idx="minor">
+            <a:schemeClr val="lt1"/>
+          </a:fontRef>
+        </p:style>
+        <p:txBody>
+          <a:bodyPr rtlCol="0" anchor="ctr"/>
+          <a:lstStyle/>
+          <a:p>
+            <a:pPr algn="ctr"/>
+          </a:p>
+        </p:txBody>
+      </p:sp>
+      <p:sp>
+        <p:nvSpPr>
+          <p:cNvPr id="3" name="TextBox 2"/>
+          <p:cNvSpPr txBox="1"/>
+          <p:nvPr/>
+        </p:nvSpPr>
+        <p:spPr>
+          <a:xfrm>
+            <a:off x="640080" y="320040"/>
+            <a:ext cx="9144000" cy="365760"/>
+          </a:xfrm>
+          <a:prstGeom prst="rect">
+            <a:avLst/>
+          </a:prstGeom>
+          <a:noFill/>
+        </p:spPr>
+        <p:txBody>
+          <a:bodyPr wrap="square">
+            <a:spAutoFit/>
+          </a:bodyPr>
+          <a:lstStyle/>
+          <a:p>
+            <a:pPr algn="l"/>
+            <a:r>
+              <a:rPr sz="1300" b="1" i="0">
+                <a:solidFill>
+                  <a:srgbClr val="1F6FEB"/>
+                </a:solidFill>
+                <a:latin typeface="Calibri"/>
+              </a:rPr>
+              <a:t>DIAGRAMAS TÉCNICOS</a:t>
+            </a:r>
+          </a:p>
+        </p:txBody>
+      </p:sp>
+      <p:sp>
+        <p:nvSpPr>
+          <p:cNvPr id="4" name="TextBox 3"/>
+          <p:cNvSpPr txBox="1"/>
+          <p:nvPr/>
+        </p:nvSpPr>
+        <p:spPr>
+          <a:xfrm>
+            <a:off x="640080" y="640080"/>
+            <a:ext cx="10789920" cy="822960"/>
+          </a:xfrm>
+          <a:prstGeom prst="rect">
+            <a:avLst/>
+          </a:prstGeom>
+          <a:noFill/>
+        </p:spPr>
+        <p:txBody>
+          <a:bodyPr wrap="square">
+            <a:spAutoFit/>
+          </a:bodyPr>
+          <a:lstStyle/>
+          <a:p>
+            <a:pPr algn="l"/>
+            <a:r>
+              <a:rPr sz="3000" b="1" i="0">
+                <a:solidFill>
+                  <a:srgbClr val="0F213B"/>
+                </a:solidFill>
+                <a:latin typeface="Calibri"/>
+              </a:rPr>
+              <a:t>Arquitetura de Infraestrutura (AWS)</a:t>
+            </a:r>
+          </a:p>
+        </p:txBody>
+      </p:sp>
+      <p:sp>
+        <p:nvSpPr>
+          <p:cNvPr id="5" name="Rectangle 4"/>
+          <p:cNvSpPr/>
+          <p:nvPr/>
+        </p:nvSpPr>
+        <p:spPr>
+          <a:xfrm>
+            <a:off x="640080" y="1417320"/>
+            <a:ext cx="1005840" cy="38100"/>
+          </a:xfrm>
+          <a:prstGeom prst="rect">
+            <a:avLst/>
+          </a:prstGeom>
+          <a:solidFill>
+            <a:srgbClr val="1F6FEB"/>
+          </a:solidFill>
+          <a:ln>
+            <a:noFill/>
+          </a:ln>
+          <a:effectLst/>
+        </p:spPr>
+        <p:style>
+          <a:lnRef idx="1">
+            <a:schemeClr val="accent1"/>
+          </a:lnRef>
+          <a:fillRef idx="3">
+            <a:schemeClr val="accent1"/>
+          </a:fillRef>
+          <a:effectRef idx="2">
+            <a:schemeClr val="accent1"/>
+          </a:effectRef>
+          <a:fontRef idx="minor">
+            <a:schemeClr val="lt1"/>
+          </a:fontRef>
+        </p:style>
+        <p:txBody>
+          <a:bodyPr rtlCol="0" anchor="ctr"/>
+          <a:lstStyle/>
+          <a:p>
+            <a:pPr algn="ctr"/>
+          </a:p>
+        </p:txBody>
+      </p:sp>
+      <p:pic>
+        <p:nvPicPr>
+          <p:cNvPr id="6" name="Picture 5" descr="diagrama-arquitetura-aws.png"/>
+          <p:cNvPicPr>
+            <a:picLocks noChangeAspect="1"/>
+          </p:cNvPicPr>
+          <p:nvPr/>
+        </p:nvPicPr>
+        <p:blipFill>
+          <a:blip r:embed="rId2"/>
+          <a:stretch>
+            <a:fillRect/>
+          </a:stretch>
+        </p:blipFill>
+        <p:spPr>
+          <a:xfrm>
+            <a:off x="2311362" y="1691640"/>
+            <a:ext cx="7568971" cy="4846320"/>
+          </a:xfrm>
+          <a:prstGeom prst="rect">
+            <a:avLst/>
+          </a:prstGeom>
+        </p:spPr>
+      </p:pic>
+      <p:sp>
+        <p:nvSpPr>
+          <p:cNvPr id="7" name="TextBox 6"/>
+          <p:cNvSpPr txBox="1"/>
+          <p:nvPr/>
+        </p:nvSpPr>
+        <p:spPr>
+          <a:xfrm>
+            <a:off x="640080" y="6473952"/>
+            <a:ext cx="5486400" cy="320040"/>
+          </a:xfrm>
+          <a:prstGeom prst="rect">
+            <a:avLst/>
+          </a:prstGeom>
+          <a:noFill/>
+        </p:spPr>
+        <p:txBody>
+          <a:bodyPr wrap="square">
+            <a:spAutoFit/>
+          </a:bodyPr>
+          <a:lstStyle/>
+          <a:p>
+            <a:pPr algn="l"/>
+            <a:r>
+              <a:rPr sz="900" b="0" i="0">
+                <a:solidFill>
+                  <a:srgbClr val="6B7A99"/>
+                </a:solidFill>
+                <a:latin typeface="Calibri"/>
+              </a:rPr>
+              <a:t>Analytic Eyes — Plataforma de Orquestração de Pipelines ETL</a:t>
+            </a:r>
+          </a:p>
+        </p:txBody>
+      </p:sp>
+      <p:sp>
+        <p:nvSpPr>
+          <p:cNvPr id="8" name="TextBox 7"/>
+          <p:cNvSpPr txBox="1"/>
+          <p:nvPr/>
+        </p:nvSpPr>
+        <p:spPr>
+          <a:xfrm>
+            <a:off x="10972800" y="6473952"/>
+            <a:ext cx="731520" cy="320040"/>
+          </a:xfrm>
+          <a:prstGeom prst="rect">
+            <a:avLst/>
+          </a:prstGeom>
+          <a:noFill/>
+        </p:spPr>
+        <p:txBody>
+          <a:bodyPr wrap="square">
+            <a:spAutoFit/>
+          </a:bodyPr>
+          <a:lstStyle/>
+          <a:p>
+            <a:pPr algn="r"/>
+            <a:r>
+              <a:rPr sz="900" b="0" i="0">
+                <a:solidFill>
+                  <a:srgbClr val="6B7A99"/>
+                </a:solidFill>
+                <a:latin typeface="Calibri"/>
+              </a:rPr>
+              <a:t>21</a:t>
+            </a:r>
+          </a:p>
+        </p:txBody>
+      </p:sp>
+    </p:spTree>
+  </p:cSld>
+  <p:clrMapOvr>
+    <a:masterClrMapping/>
+  </p:clrMapOvr>
+</p:sld>
+</file>
+
+<file path=ppt/slides/slide22.xml><?xml version="1.0" encoding="utf-8"?>
+<p:sld xmlns:a="http://schemas.openxmlformats.org/drawingml/2006/main" xmlns:p="http://schemas.openxmlformats.org/presentationml/2006/main" xmlns:r="http://schemas.openxmlformats.org/officeDocument/2006/relationships">
+  <p:cSld>
+    <p:bg>
+      <p:bgPr>
+        <a:solidFill>
+          <a:srgbClr val="0F213B"/>
+        </a:solidFill>
+        <a:effectLst/>
+      </p:bgPr>
+    </p:bg>
+    <p:spTree>
+      <p:nvGrpSpPr>
+        <p:cNvPr id="1" name=""/>
+        <p:cNvGrpSpPr/>
+        <p:nvPr/>
+      </p:nvGrpSpPr>
+      <p:grpSpPr/>
+      <p:sp>
+        <p:nvSpPr>
+          <p:cNvPr id="2" name="Rectangle 1"/>
+          <p:cNvSpPr/>
+          <p:nvPr/>
+        </p:nvSpPr>
+        <p:spPr>
+          <a:xfrm>
+            <a:off x="0" y="3017520"/>
+            <a:ext cx="12191695" cy="38100"/>
+          </a:xfrm>
+          <a:prstGeom prst="rect">
+            <a:avLst/>
+          </a:prstGeom>
+          <a:solidFill>
+            <a:srgbClr val="1F6FEB"/>
+          </a:solidFill>
+          <a:ln>
+            <a:noFill/>
+          </a:ln>
+          <a:effectLst/>
+        </p:spPr>
+        <p:style>
+          <a:lnRef idx="1">
+            <a:schemeClr val="accent1"/>
+          </a:lnRef>
+          <a:fillRef idx="3">
+            <a:schemeClr val="accent1"/>
+          </a:fillRef>
+          <a:effectRef idx="2">
+            <a:schemeClr val="accent1"/>
+          </a:effectRef>
+          <a:fontRef idx="minor">
+            <a:schemeClr val="lt1"/>
+          </a:fontRef>
+        </p:style>
+        <p:txBody>
+          <a:bodyPr rtlCol="0" anchor="ctr"/>
+          <a:lstStyle/>
+          <a:p>
+            <a:pPr algn="ctr"/>
+          </a:p>
+        </p:txBody>
+      </p:sp>
+      <p:sp>
+        <p:nvSpPr>
+          <p:cNvPr id="3" name="TextBox 2"/>
+          <p:cNvSpPr txBox="1"/>
+          <p:nvPr/>
+        </p:nvSpPr>
+        <p:spPr>
+          <a:xfrm>
+            <a:off x="822960" y="2377440"/>
+            <a:ext cx="10515600" cy="914400"/>
+          </a:xfrm>
+          <a:prstGeom prst="rect">
+            <a:avLst/>
+          </a:prstGeom>
+          <a:noFill/>
+        </p:spPr>
+        <p:txBody>
+          <a:bodyPr wrap="square">
+            <a:spAutoFit/>
+          </a:bodyPr>
+          <a:lstStyle/>
+          <a:p>
+            <a:pPr algn="l"/>
+            <a:r>
+              <a:rPr sz="4400" b="1" i="0">
+                <a:solidFill>
+                  <a:srgbClr val="FFFFFF"/>
+                </a:solidFill>
+                <a:latin typeface="Calibri"/>
+              </a:rPr>
+              <a:t>Obrigado</a:t>
+            </a:r>
+          </a:p>
+        </p:txBody>
+      </p:sp>
+      <p:sp>
+        <p:nvSpPr>
+          <p:cNvPr id="4" name="TextBox 3"/>
+          <p:cNvSpPr txBox="1"/>
+          <p:nvPr/>
+        </p:nvSpPr>
+        <p:spPr>
+          <a:xfrm>
+            <a:off x="822960" y="3246120"/>
+            <a:ext cx="10058400" cy="548640"/>
+          </a:xfrm>
+          <a:prstGeom prst="rect">
+            <a:avLst/>
+          </a:prstGeom>
+          <a:noFill/>
+        </p:spPr>
+        <p:txBody>
+          <a:bodyPr wrap="square">
+            <a:spAutoFit/>
+          </a:bodyPr>
+          <a:lstStyle/>
+          <a:p>
+            <a:pPr algn="l"/>
+            <a:r>
+              <a:rPr sz="1800" b="0" i="0">
+                <a:solidFill>
+                  <a:srgbClr val="9FC1FF"/>
+                </a:solidFill>
+                <a:latin typeface="Calibri"/>
+              </a:rPr>
+              <a:t>Dúvidas e discussão</a:t>
+            </a:r>
+          </a:p>
+        </p:txBody>
+      </p:sp>
+      <p:sp>
+        <p:nvSpPr>
+          <p:cNvPr id="5" name="TextBox 4"/>
+          <p:cNvSpPr txBox="1"/>
+          <p:nvPr/>
+        </p:nvSpPr>
+        <p:spPr>
+          <a:xfrm>
+            <a:off x="822960" y="6035040"/>
+            <a:ext cx="10058400" cy="365760"/>
+          </a:xfrm>
+          <a:prstGeom prst="rect">
+            <a:avLst/>
+          </a:prstGeom>
+          <a:noFill/>
+        </p:spPr>
+        <p:txBody>
+          <a:bodyPr wrap="square">
+            <a:spAutoFit/>
+          </a:bodyPr>
+          <a:lstStyle/>
+          <a:p>
+            <a:pPr algn="l"/>
+            <a:r>
+              <a:rPr sz="1200" b="0" i="0">
+                <a:solidFill>
+                  <a:srgbClr val="B9C7DE"/>
+                </a:solidFill>
+                <a:latin typeface="Calibri"/>
+              </a:rPr>
+              <a:t>Documentação técnica completa disponível em documento complementar.</a:t>
             </a:r>
           </a:p>
         </p:txBody>
